--- a/demo_site/files/slides/lecture1_intro.pptx
+++ b/demo_site/files/slides/lecture1_intro.pptx
@@ -19,14 +19,13 @@
     <p:sldId id="266" r:id="rId13"/>
     <p:sldId id="267" r:id="rId14"/>
     <p:sldId id="268" r:id="rId15"/>
-    <p:sldId id="270" r:id="rId16"/>
-    <p:sldId id="275" r:id="rId17"/>
-    <p:sldId id="277" r:id="rId18"/>
-    <p:sldId id="269" r:id="rId19"/>
-    <p:sldId id="278" r:id="rId20"/>
-    <p:sldId id="274" r:id="rId21"/>
-    <p:sldId id="272" r:id="rId22"/>
-    <p:sldId id="273" r:id="rId23"/>
+    <p:sldId id="279" r:id="rId16"/>
+    <p:sldId id="417" r:id="rId17"/>
+    <p:sldId id="418" r:id="rId18"/>
+    <p:sldId id="419" r:id="rId19"/>
+    <p:sldId id="420" r:id="rId20"/>
+    <p:sldId id="421" r:id="rId21"/>
+    <p:sldId id="422" r:id="rId22"/>
   </p:sldIdLst>
   <p:sldSz cx="12192000" cy="6858000"/>
   <p:notesSz cx="6858000" cy="9144000"/>
@@ -280,7 +279,7 @@
           <a:p>
             <a:fld id="{2DB93FBE-67AC-4C5C-B62E-CFFDEAF9BE53}" type="datetimeFigureOut">
               <a:rPr lang="en-US" smtClean="0"/>
-              <a:t>1/5/2026</a:t>
+              <a:t>3/30/2026</a:t>
             </a:fld>
             <a:endParaRPr lang="en-US"/>
           </a:p>
@@ -478,7 +477,7 @@
           <a:p>
             <a:fld id="{2DB93FBE-67AC-4C5C-B62E-CFFDEAF9BE53}" type="datetimeFigureOut">
               <a:rPr lang="en-US" smtClean="0"/>
-              <a:t>1/5/2026</a:t>
+              <a:t>3/30/2026</a:t>
             </a:fld>
             <a:endParaRPr lang="en-US"/>
           </a:p>
@@ -686,7 +685,7 @@
           <a:p>
             <a:fld id="{2DB93FBE-67AC-4C5C-B62E-CFFDEAF9BE53}" type="datetimeFigureOut">
               <a:rPr lang="en-US" smtClean="0"/>
-              <a:t>1/5/2026</a:t>
+              <a:t>3/30/2026</a:t>
             </a:fld>
             <a:endParaRPr lang="en-US"/>
           </a:p>
@@ -884,7 +883,7 @@
           <a:p>
             <a:fld id="{2DB93FBE-67AC-4C5C-B62E-CFFDEAF9BE53}" type="datetimeFigureOut">
               <a:rPr lang="en-US" smtClean="0"/>
-              <a:t>1/5/2026</a:t>
+              <a:t>3/30/2026</a:t>
             </a:fld>
             <a:endParaRPr lang="en-US"/>
           </a:p>
@@ -1159,7 +1158,7 @@
           <a:p>
             <a:fld id="{2DB93FBE-67AC-4C5C-B62E-CFFDEAF9BE53}" type="datetimeFigureOut">
               <a:rPr lang="en-US" smtClean="0"/>
-              <a:t>1/5/2026</a:t>
+              <a:t>3/30/2026</a:t>
             </a:fld>
             <a:endParaRPr lang="en-US"/>
           </a:p>
@@ -1424,7 +1423,7 @@
           <a:p>
             <a:fld id="{2DB93FBE-67AC-4C5C-B62E-CFFDEAF9BE53}" type="datetimeFigureOut">
               <a:rPr lang="en-US" smtClean="0"/>
-              <a:t>1/5/2026</a:t>
+              <a:t>3/30/2026</a:t>
             </a:fld>
             <a:endParaRPr lang="en-US"/>
           </a:p>
@@ -1836,7 +1835,7 @@
           <a:p>
             <a:fld id="{2DB93FBE-67AC-4C5C-B62E-CFFDEAF9BE53}" type="datetimeFigureOut">
               <a:rPr lang="en-US" smtClean="0"/>
-              <a:t>1/5/2026</a:t>
+              <a:t>3/30/2026</a:t>
             </a:fld>
             <a:endParaRPr lang="en-US"/>
           </a:p>
@@ -1977,7 +1976,7 @@
           <a:p>
             <a:fld id="{2DB93FBE-67AC-4C5C-B62E-CFFDEAF9BE53}" type="datetimeFigureOut">
               <a:rPr lang="en-US" smtClean="0"/>
-              <a:t>1/5/2026</a:t>
+              <a:t>3/30/2026</a:t>
             </a:fld>
             <a:endParaRPr lang="en-US"/>
           </a:p>
@@ -2090,7 +2089,7 @@
           <a:p>
             <a:fld id="{2DB93FBE-67AC-4C5C-B62E-CFFDEAF9BE53}" type="datetimeFigureOut">
               <a:rPr lang="en-US" smtClean="0"/>
-              <a:t>1/5/2026</a:t>
+              <a:t>3/30/2026</a:t>
             </a:fld>
             <a:endParaRPr lang="en-US"/>
           </a:p>
@@ -2401,7 +2400,7 @@
           <a:p>
             <a:fld id="{2DB93FBE-67AC-4C5C-B62E-CFFDEAF9BE53}" type="datetimeFigureOut">
               <a:rPr lang="en-US" smtClean="0"/>
-              <a:t>1/5/2026</a:t>
+              <a:t>3/30/2026</a:t>
             </a:fld>
             <a:endParaRPr lang="en-US"/>
           </a:p>
@@ -2689,7 +2688,7 @@
           <a:p>
             <a:fld id="{2DB93FBE-67AC-4C5C-B62E-CFFDEAF9BE53}" type="datetimeFigureOut">
               <a:rPr lang="en-US" smtClean="0"/>
-              <a:t>1/5/2026</a:t>
+              <a:t>3/30/2026</a:t>
             </a:fld>
             <a:endParaRPr lang="en-US"/>
           </a:p>
@@ -2930,7 +2929,7 @@
           <a:p>
             <a:fld id="{2DB93FBE-67AC-4C5C-B62E-CFFDEAF9BE53}" type="datetimeFigureOut">
               <a:rPr lang="en-US" smtClean="0"/>
-              <a:t>1/5/2026</a:t>
+              <a:t>3/30/2026</a:t>
             </a:fld>
             <a:endParaRPr lang="en-US"/>
           </a:p>
@@ -6745,7 +6744,7 @@
     </p:spTree>
     <p:extLst>
       <p:ext uri="{BB962C8B-B14F-4D97-AF65-F5344CB8AC3E}">
-        <p14:creationId xmlns:p14="http://schemas.microsoft.com/office/powerpoint/2010/main" val="2494074382"/>
+        <p14:creationId xmlns:p14="http://schemas.microsoft.com/office/powerpoint/2010/main" val="4175234548"/>
       </p:ext>
     </p:extLst>
   </p:cSld>
@@ -8227,7 +8226,7 @@
     </p:spTree>
     <p:extLst>
       <p:ext uri="{BB962C8B-B14F-4D97-AF65-F5344CB8AC3E}">
-        <p14:creationId xmlns:p14="http://schemas.microsoft.com/office/powerpoint/2010/main" val="2718290188"/>
+        <p14:creationId xmlns:p14="http://schemas.microsoft.com/office/powerpoint/2010/main" val="2562382216"/>
       </p:ext>
     </p:extLst>
   </p:cSld>
@@ -11135,7 +11134,7 @@
     </p:spTree>
     <p:extLst>
       <p:ext uri="{BB962C8B-B14F-4D97-AF65-F5344CB8AC3E}">
-        <p14:creationId xmlns:p14="http://schemas.microsoft.com/office/powerpoint/2010/main" val="2767680600"/>
+        <p14:creationId xmlns:p14="http://schemas.microsoft.com/office/powerpoint/2010/main" val="2254727802"/>
       </p:ext>
     </p:extLst>
   </p:cSld>
@@ -12940,7 +12939,7 @@
     </p:spTree>
     <p:extLst>
       <p:ext uri="{BB962C8B-B14F-4D97-AF65-F5344CB8AC3E}">
-        <p14:creationId xmlns:p14="http://schemas.microsoft.com/office/powerpoint/2010/main" val="3277966798"/>
+        <p14:creationId xmlns:p14="http://schemas.microsoft.com/office/powerpoint/2010/main" val="1165435876"/>
       </p:ext>
     </p:extLst>
   </p:cSld>
@@ -14859,7 +14858,7 @@
     </p:spTree>
     <p:extLst>
       <p:ext uri="{BB962C8B-B14F-4D97-AF65-F5344CB8AC3E}">
-        <p14:creationId xmlns:p14="http://schemas.microsoft.com/office/powerpoint/2010/main" val="3699825754"/>
+        <p14:creationId xmlns:p14="http://schemas.microsoft.com/office/powerpoint/2010/main" val="2538202624"/>
       </p:ext>
     </p:extLst>
   </p:cSld>
@@ -15346,7 +15345,7 @@
     </p:spTree>
     <p:extLst>
       <p:ext uri="{BB962C8B-B14F-4D97-AF65-F5344CB8AC3E}">
-        <p14:creationId xmlns:p14="http://schemas.microsoft.com/office/powerpoint/2010/main" val="1374528974"/>
+        <p14:creationId xmlns:p14="http://schemas.microsoft.com/office/powerpoint/2010/main" val="1054395054"/>
       </p:ext>
     </p:extLst>
   </p:cSld>
@@ -15396,104 +15395,6 @@
           <a:p>
             <a:r>
               <a:rPr lang="en-US" dirty="0"/>
-              <a:t>ADT: Stack (Activity)</a:t>
-            </a:r>
-          </a:p>
-        </p:txBody>
-      </p:sp>
-      <p:sp>
-        <p:nvSpPr>
-          <p:cNvPr id="3" name="Content Placeholder 2">
-            <a:extLst>
-              <a:ext uri="{FF2B5EF4-FFF2-40B4-BE49-F238E27FC236}">
-                <a16:creationId xmlns:a16="http://schemas.microsoft.com/office/drawing/2014/main" id="{B5EF048E-DA88-5227-7793-0EE138E7390F}"/>
-              </a:ext>
-            </a:extLst>
-          </p:cNvPr>
-          <p:cNvSpPr>
-            <a:spLocks noGrp="1"/>
-          </p:cNvSpPr>
-          <p:nvPr>
-            <p:ph idx="1"/>
-          </p:nvPr>
-        </p:nvSpPr>
-        <p:spPr/>
-        <p:txBody>
-          <a:bodyPr/>
-          <a:lstStyle/>
-          <a:p>
-            <a:r>
-              <a:rPr lang="en-US" dirty="0"/>
-              <a:t>What is it?</a:t>
-            </a:r>
-          </a:p>
-          <a:p>
-            <a:r>
-              <a:rPr lang="en-US" dirty="0"/>
-              <a:t>What operations do we need?</a:t>
-            </a:r>
-          </a:p>
-          <a:p>
-            <a:r>
-              <a:rPr lang="en-US" dirty="0"/>
-              <a:t>Suggested data structures?</a:t>
-            </a:r>
-          </a:p>
-        </p:txBody>
-      </p:sp>
-    </p:spTree>
-    <p:extLst>
-      <p:ext uri="{BB962C8B-B14F-4D97-AF65-F5344CB8AC3E}">
-        <p14:creationId xmlns:p14="http://schemas.microsoft.com/office/powerpoint/2010/main" val="1095121045"/>
-      </p:ext>
-    </p:extLst>
-  </p:cSld>
-  <p:clrMapOvr>
-    <a:masterClrMapping/>
-  </p:clrMapOvr>
-</p:sld>
-</file>
-
-<file path=ppt/slides/slide22.xml><?xml version="1.0" encoding="utf-8"?>
-<p:sld xmlns:a="http://schemas.openxmlformats.org/drawingml/2006/main" xmlns:r="http://schemas.openxmlformats.org/officeDocument/2006/relationships" xmlns:p="http://schemas.openxmlformats.org/presentationml/2006/main">
-  <p:cSld>
-    <p:spTree>
-      <p:nvGrpSpPr>
-        <p:cNvPr id="1" name=""/>
-        <p:cNvGrpSpPr/>
-        <p:nvPr/>
-      </p:nvGrpSpPr>
-      <p:grpSpPr>
-        <a:xfrm>
-          <a:off x="0" y="0"/>
-          <a:ext cx="0" cy="0"/>
-          <a:chOff x="0" y="0"/>
-          <a:chExt cx="0" cy="0"/>
-        </a:xfrm>
-      </p:grpSpPr>
-      <p:sp>
-        <p:nvSpPr>
-          <p:cNvPr id="2" name="Title 1">
-            <a:extLst>
-              <a:ext uri="{FF2B5EF4-FFF2-40B4-BE49-F238E27FC236}">
-                <a16:creationId xmlns:a16="http://schemas.microsoft.com/office/drawing/2014/main" id="{D70D41E5-465C-EBB5-E9CD-029376B833DF}"/>
-              </a:ext>
-            </a:extLst>
-          </p:cNvPr>
-          <p:cNvSpPr>
-            <a:spLocks noGrp="1"/>
-          </p:cNvSpPr>
-          <p:nvPr>
-            <p:ph type="title"/>
-          </p:nvPr>
-        </p:nvSpPr>
-        <p:spPr/>
-        <p:txBody>
-          <a:bodyPr/>
-          <a:lstStyle/>
-          <a:p>
-            <a:r>
-              <a:rPr lang="en-US" dirty="0"/>
               <a:t>ADT: Stack</a:t>
             </a:r>
           </a:p>
@@ -15602,7 +15503,7 @@
     </p:spTree>
     <p:extLst>
       <p:ext uri="{BB962C8B-B14F-4D97-AF65-F5344CB8AC3E}">
-        <p14:creationId xmlns:p14="http://schemas.microsoft.com/office/powerpoint/2010/main" val="39125618"/>
+        <p14:creationId xmlns:p14="http://schemas.microsoft.com/office/powerpoint/2010/main" val="4120428912"/>
       </p:ext>
     </p:extLst>
   </p:cSld>
@@ -16503,178 +16404,128 @@
           </a:p>
         </p:txBody>
       </p:sp>
-      <mc:AlternateContent xmlns:mc="http://schemas.openxmlformats.org/markup-compatibility/2006" xmlns:a14="http://schemas.microsoft.com/office/drawing/2010/main">
-        <mc:Choice Requires="a14">
-          <p:sp>
-            <p:nvSpPr>
-              <p:cNvPr id="3" name="Content Placeholder 2">
-                <a:extLst>
-                  <a:ext uri="{FF2B5EF4-FFF2-40B4-BE49-F238E27FC236}">
-                    <a16:creationId xmlns:a16="http://schemas.microsoft.com/office/drawing/2014/main" id="{E2ABC400-4330-F5F0-6E31-F9CB391454A7}"/>
-                  </a:ext>
-                </a:extLst>
-              </p:cNvPr>
-              <p:cNvSpPr>
-                <a:spLocks noGrp="1"/>
-              </p:cNvSpPr>
-              <p:nvPr>
-                <p:ph idx="1"/>
-              </p:nvPr>
-            </p:nvSpPr>
-            <p:spPr/>
-            <p:txBody>
-              <a:bodyPr>
-                <a:normAutofit fontScale="92500" lnSpcReduction="20000"/>
-              </a:bodyPr>
-              <a:lstStyle/>
-              <a:p>
-                <a:r>
-                  <a:rPr lang="en-US" dirty="0"/>
-                  <a:t>13 </a:t>
-                </a:r>
-                <a14:m>
-                  <m:oMath xmlns:m="http://schemas.openxmlformats.org/officeDocument/2006/math">
-                    <m:r>
-                      <a:rPr lang="en-US" b="0" i="1" smtClean="0">
-                        <a:latin typeface="Cambria Math" panose="02040503050406030204" pitchFamily="18" charset="0"/>
-                      </a:rPr>
-                      <m:t>≥</m:t>
-                    </m:r>
-                  </m:oMath>
-                </a14:m>
-                <a:r>
-                  <a:rPr lang="en-US" dirty="0"/>
-                  <a:t>Weekly homework exercises (4.5% each, 54% total)</a:t>
-                </a:r>
-              </a:p>
-              <a:p>
-                <a:pPr lvl="1"/>
-                <a:r>
-                  <a:rPr lang="en-US" dirty="0"/>
-                  <a:t>The lowest 1 will be dropped</a:t>
-                </a:r>
-              </a:p>
-              <a:p>
-                <a:pPr lvl="2"/>
-                <a:r>
-                  <a:rPr lang="en-US" dirty="0"/>
-                  <a:t>Except for EX12, which cannot be dropped</a:t>
-                </a:r>
-              </a:p>
-              <a:p>
-                <a:r>
-                  <a:rPr lang="en-US" dirty="0"/>
-                  <a:t>Midterm and final exam (40% total)</a:t>
-                </a:r>
-              </a:p>
-              <a:p>
-                <a:pPr lvl="1"/>
-                <a:r>
-                  <a:rPr lang="en-US" dirty="0"/>
-                  <a:t>Midterm weighted 15%</a:t>
-                </a:r>
-              </a:p>
-              <a:p>
-                <a:pPr lvl="1"/>
-                <a:r>
-                  <a:rPr lang="en-US" dirty="0"/>
-                  <a:t>Final weighted 25%</a:t>
-                </a:r>
-              </a:p>
-              <a:p>
-                <a:pPr lvl="1"/>
-                <a:r>
-                  <a:rPr lang="en-US" dirty="0"/>
-                  <a:t>In-person</a:t>
-                </a:r>
-              </a:p>
-              <a:p>
-                <a:pPr lvl="1"/>
-                <a:r>
-                  <a:rPr lang="en-US" dirty="0"/>
-                  <a:t>Midterm in class on Friday 11/1</a:t>
-                </a:r>
-              </a:p>
-              <a:p>
-                <a:pPr lvl="1"/>
-                <a:r>
-                  <a:rPr lang="en-US" dirty="0"/>
-                  <a:t>Final at 8:30am on Thursday 12/2</a:t>
-                </a:r>
-              </a:p>
-              <a:p>
-                <a:r>
-                  <a:rPr lang="en-US" dirty="0"/>
-                  <a:t>Concept Checks (0.33% each, 6% total)</a:t>
-                </a:r>
-              </a:p>
-              <a:p>
-                <a:pPr lvl="1"/>
-                <a:r>
-                  <a:rPr lang="en-US" dirty="0"/>
-                  <a:t>One per “concept” in the course</a:t>
-                </a:r>
-              </a:p>
-              <a:p>
-                <a:pPr lvl="1"/>
-                <a:r>
-                  <a:rPr lang="en-US" dirty="0"/>
-                  <a:t>We instantly tell you whether you got each question correct</a:t>
-                </a:r>
-              </a:p>
-              <a:p>
-                <a:pPr lvl="1"/>
-                <a:r>
-                  <a:rPr lang="en-US" dirty="0"/>
-                  <a:t>Unlimited submissions, so keep at it!</a:t>
-                </a:r>
-              </a:p>
-              <a:p>
-                <a:endParaRPr lang="en-US" dirty="0"/>
-              </a:p>
-            </p:txBody>
-          </p:sp>
-        </mc:Choice>
-        <mc:Fallback xmlns="">
-          <p:sp>
-            <p:nvSpPr>
-              <p:cNvPr id="3" name="Content Placeholder 2">
-                <a:extLst>
-                  <a:ext uri="{FF2B5EF4-FFF2-40B4-BE49-F238E27FC236}">
-                    <a16:creationId xmlns:a16="http://schemas.microsoft.com/office/drawing/2014/main" id="{E2ABC400-4330-F5F0-6E31-F9CB391454A7}"/>
-                  </a:ext>
-                </a:extLst>
-              </p:cNvPr>
-              <p:cNvSpPr>
-                <a:spLocks noGrp="1" noRot="1" noChangeAspect="1" noMove="1" noResize="1" noEditPoints="1" noAdjustHandles="1" noChangeArrowheads="1" noChangeShapeType="1" noTextEdit="1"/>
-              </p:cNvSpPr>
-              <p:nvPr>
-                <p:ph idx="1"/>
-              </p:nvPr>
-            </p:nvSpPr>
-            <p:spPr>
-              <a:blipFill>
-                <a:blip r:embed="rId2"/>
-                <a:stretch>
-                  <a:fillRect l="-928" t="-3501"/>
-                </a:stretch>
-              </a:blipFill>
-            </p:spPr>
-            <p:txBody>
-              <a:bodyPr/>
-              <a:lstStyle/>
-              <a:p>
-                <a:r>
-                  <a:rPr lang="en-US">
-                    <a:noFill/>
-                  </a:rPr>
-                  <a:t> </a:t>
-                </a:r>
-              </a:p>
-            </p:txBody>
-          </p:sp>
-        </mc:Fallback>
-      </mc:AlternateContent>
+      <p:sp>
+        <p:nvSpPr>
+          <p:cNvPr id="3" name="Content Placeholder 2">
+            <a:extLst>
+              <a:ext uri="{FF2B5EF4-FFF2-40B4-BE49-F238E27FC236}">
+                <a16:creationId xmlns:a16="http://schemas.microsoft.com/office/drawing/2014/main" id="{E2ABC400-4330-F5F0-6E31-F9CB391454A7}"/>
+              </a:ext>
+            </a:extLst>
+          </p:cNvPr>
+          <p:cNvSpPr>
+            <a:spLocks noGrp="1"/>
+          </p:cNvSpPr>
+          <p:nvPr>
+            <p:ph idx="1"/>
+          </p:nvPr>
+        </p:nvSpPr>
+        <p:spPr/>
+        <p:txBody>
+          <a:bodyPr>
+            <a:normAutofit fontScale="85000" lnSpcReduction="20000"/>
+          </a:bodyPr>
+          <a:lstStyle/>
+          <a:p>
+            <a:r>
+              <a:rPr lang="en-US" dirty="0"/>
+              <a:t>13 Weekly homework exercises (4.67% each, 56% total)</a:t>
+            </a:r>
+          </a:p>
+          <a:p>
+            <a:pPr lvl="1"/>
+            <a:r>
+              <a:rPr lang="en-US" dirty="0"/>
+              <a:t>The lowest 1 will be dropped</a:t>
+            </a:r>
+          </a:p>
+          <a:p>
+            <a:pPr lvl="2"/>
+            <a:r>
+              <a:rPr lang="en-US" dirty="0"/>
+              <a:t>Except for EX12, which cannot be dropped</a:t>
+            </a:r>
+          </a:p>
+          <a:p>
+            <a:r>
+              <a:rPr lang="en-US" dirty="0"/>
+              <a:t>Midterm and final exam (40% total)</a:t>
+            </a:r>
+          </a:p>
+          <a:p>
+            <a:pPr lvl="1"/>
+            <a:r>
+              <a:rPr lang="en-US" dirty="0"/>
+              <a:t>Midterm weighted 15%</a:t>
+            </a:r>
+          </a:p>
+          <a:p>
+            <a:pPr lvl="1"/>
+            <a:r>
+              <a:rPr lang="en-US" dirty="0"/>
+              <a:t>Final weighted 25%</a:t>
+            </a:r>
+          </a:p>
+          <a:p>
+            <a:pPr lvl="1"/>
+            <a:r>
+              <a:rPr lang="en-US" dirty="0"/>
+              <a:t>In-person</a:t>
+            </a:r>
+          </a:p>
+          <a:p>
+            <a:pPr lvl="1"/>
+            <a:r>
+              <a:rPr lang="en-US" dirty="0"/>
+              <a:t>Midterm in class on Monday 05/04</a:t>
+            </a:r>
+          </a:p>
+          <a:p>
+            <a:pPr lvl="1"/>
+            <a:r>
+              <a:rPr lang="en-US" dirty="0"/>
+              <a:t>Final at 12:30pm on Thursday 06/11</a:t>
+            </a:r>
+          </a:p>
+          <a:p>
+            <a:r>
+              <a:rPr lang="en-US" dirty="0"/>
+              <a:t>17 Concept Checks (0.25% each, 4% total)</a:t>
+            </a:r>
+          </a:p>
+          <a:p>
+            <a:pPr lvl="1"/>
+            <a:r>
+              <a:rPr lang="en-US" dirty="0"/>
+              <a:t>The lowest 1 will be dropped</a:t>
+            </a:r>
+          </a:p>
+          <a:p>
+            <a:pPr lvl="1"/>
+            <a:r>
+              <a:rPr lang="en-US" dirty="0"/>
+              <a:t>One per “concept” in the course</a:t>
+            </a:r>
+          </a:p>
+          <a:p>
+            <a:pPr lvl="1"/>
+            <a:r>
+              <a:rPr lang="en-US" dirty="0"/>
+              <a:t>We instantly tell you whether you got each question correct</a:t>
+            </a:r>
+          </a:p>
+          <a:p>
+            <a:pPr lvl="1"/>
+            <a:r>
+              <a:rPr lang="en-US" dirty="0"/>
+              <a:t>Unlimited submissions, so keep at it!</a:t>
+            </a:r>
+          </a:p>
+          <a:p>
+            <a:endParaRPr lang="en-US" dirty="0"/>
+          </a:p>
+        </p:txBody>
+      </p:sp>
     </p:spTree>
     <p:extLst>
       <p:ext uri="{BB962C8B-B14F-4D97-AF65-F5344CB8AC3E}">

--- a/demo_site/files/slides/lecture1_intro.pptx
+++ b/demo_site/files/slides/lecture1_intro.pptx
@@ -3371,7 +3371,7 @@
           <a:p>
             <a:r>
               <a:rPr lang="en-US" dirty="0"/>
-              <a:t>CSE 332 Winter 2026</a:t>
+              <a:t>CSE 332 Spring 2026</a:t>
             </a:r>
             <a:br>
               <a:rPr lang="en-US" dirty="0"/>
@@ -11192,94 +11192,6 @@
           </a:p>
         </p:txBody>
       </p:sp>
-      <p:sp>
-        <p:nvSpPr>
-          <p:cNvPr id="3" name="Content Placeholder 2">
-            <a:extLst>
-              <a:ext uri="{FF2B5EF4-FFF2-40B4-BE49-F238E27FC236}">
-                <a16:creationId xmlns:a16="http://schemas.microsoft.com/office/drawing/2014/main" id="{1376FFCF-F09D-CE03-F022-D39AD4A97E9E}"/>
-              </a:ext>
-              <a:ext uri="{C183D7F6-B498-43B3-948B-1728B52AA6E4}">
-                <adec:decorative xmlns:adec="http://schemas.microsoft.com/office/drawing/2017/decorative" val="0"/>
-              </a:ext>
-            </a:extLst>
-          </p:cNvPr>
-          <p:cNvSpPr>
-            <a:spLocks noGrp="1"/>
-          </p:cNvSpPr>
-          <p:nvPr>
-            <p:ph idx="1"/>
-          </p:nvPr>
-        </p:nvSpPr>
-        <p:spPr>
-          <a:xfrm>
-            <a:off x="268946" y="2505200"/>
-            <a:ext cx="10515600" cy="4351338"/>
-          </a:xfrm>
-        </p:spPr>
-        <p:txBody>
-          <a:bodyPr/>
-          <a:lstStyle/>
-          <a:p>
-            <a:r>
-              <a:rPr lang="en-US" dirty="0"/>
-              <a:t>Queue represented as an array of items</a:t>
-            </a:r>
-          </a:p>
-          <a:p>
-            <a:pPr lvl="1"/>
-            <a:r>
-              <a:rPr lang="en-US" dirty="0">
-                <a:solidFill>
-                  <a:srgbClr val="0070C0"/>
-                </a:solidFill>
-              </a:rPr>
-              <a:t>A “front” index to indicate the oldest item in the queue</a:t>
-            </a:r>
-          </a:p>
-          <a:p>
-            <a:pPr lvl="1"/>
-            <a:r>
-              <a:rPr lang="en-US" dirty="0">
-                <a:solidFill>
-                  <a:schemeClr val="accent2">
-                    <a:lumMod val="75000"/>
-                  </a:schemeClr>
-                </a:solidFill>
-              </a:rPr>
-              <a:t>A “back” index to indicate the most recent item in the queue</a:t>
-            </a:r>
-          </a:p>
-          <a:p>
-            <a:r>
-              <a:rPr lang="en-US" dirty="0"/>
-              <a:t>enqueue Procedure:</a:t>
-            </a:r>
-          </a:p>
-          <a:p>
-            <a:endParaRPr lang="en-US" dirty="0"/>
-          </a:p>
-          <a:p>
-            <a:r>
-              <a:rPr lang="en-US" dirty="0"/>
-              <a:t>dequeue Procedure:</a:t>
-            </a:r>
-          </a:p>
-          <a:p>
-            <a:endParaRPr lang="en-US" dirty="0"/>
-          </a:p>
-          <a:p>
-            <a:r>
-              <a:rPr lang="en-US" dirty="0" err="1"/>
-              <a:t>isEmpty</a:t>
-            </a:r>
-            <a:r>
-              <a:rPr lang="en-US" dirty="0"/>
-              <a:t> Procedure:</a:t>
-            </a:r>
-          </a:p>
-        </p:txBody>
-      </p:sp>
       <p:grpSp>
         <p:nvGrpSpPr>
           <p:cNvPr id="32" name="Group 31" descr="An illustration of a circular array queue data structure. The elements of the queue are contained in an array. Because the array will not necessarily be occupied starting from index 0, we additionally have a field called &quot;front&quot; that indicates which index of the array contains the first item in the queue, and a field called &quot;back&quot; that indicates which index in teh array contains the last item in the queue.">
@@ -12611,6 +12523,94 @@
       </p:grpSp>
       <p:sp>
         <p:nvSpPr>
+          <p:cNvPr id="3" name="Content Placeholder 2">
+            <a:extLst>
+              <a:ext uri="{FF2B5EF4-FFF2-40B4-BE49-F238E27FC236}">
+                <a16:creationId xmlns:a16="http://schemas.microsoft.com/office/drawing/2014/main" id="{1376FFCF-F09D-CE03-F022-D39AD4A97E9E}"/>
+              </a:ext>
+              <a:ext uri="{C183D7F6-B498-43B3-948B-1728B52AA6E4}">
+                <adec:decorative xmlns:adec="http://schemas.microsoft.com/office/drawing/2017/decorative" val="0"/>
+              </a:ext>
+            </a:extLst>
+          </p:cNvPr>
+          <p:cNvSpPr>
+            <a:spLocks noGrp="1"/>
+          </p:cNvSpPr>
+          <p:nvPr>
+            <p:ph idx="1"/>
+          </p:nvPr>
+        </p:nvSpPr>
+        <p:spPr>
+          <a:xfrm>
+            <a:off x="268946" y="2291840"/>
+            <a:ext cx="10515600" cy="4351338"/>
+          </a:xfrm>
+        </p:spPr>
+        <p:txBody>
+          <a:bodyPr/>
+          <a:lstStyle/>
+          <a:p>
+            <a:r>
+              <a:rPr lang="en-US" dirty="0"/>
+              <a:t>Queue represented as an array of items</a:t>
+            </a:r>
+          </a:p>
+          <a:p>
+            <a:pPr lvl="1"/>
+            <a:r>
+              <a:rPr lang="en-US" dirty="0">
+                <a:solidFill>
+                  <a:srgbClr val="0070C0"/>
+                </a:solidFill>
+              </a:rPr>
+              <a:t>A “front” index to indicate the oldest item in the queue</a:t>
+            </a:r>
+          </a:p>
+          <a:p>
+            <a:pPr lvl="1"/>
+            <a:r>
+              <a:rPr lang="en-US" dirty="0">
+                <a:solidFill>
+                  <a:schemeClr val="accent2">
+                    <a:lumMod val="75000"/>
+                  </a:schemeClr>
+                </a:solidFill>
+              </a:rPr>
+              <a:t>A “back” index to indicate the most recent item in the queue</a:t>
+            </a:r>
+          </a:p>
+          <a:p>
+            <a:r>
+              <a:rPr lang="en-US" dirty="0"/>
+              <a:t>enqueue Procedure:</a:t>
+            </a:r>
+          </a:p>
+          <a:p>
+            <a:endParaRPr lang="en-US" dirty="0"/>
+          </a:p>
+          <a:p>
+            <a:r>
+              <a:rPr lang="en-US" dirty="0"/>
+              <a:t>dequeue Procedure:</a:t>
+            </a:r>
+          </a:p>
+          <a:p>
+            <a:endParaRPr lang="en-US" dirty="0"/>
+          </a:p>
+          <a:p>
+            <a:r>
+              <a:rPr lang="en-US" dirty="0" err="1"/>
+              <a:t>isEmpty</a:t>
+            </a:r>
+            <a:r>
+              <a:rPr lang="en-US" dirty="0"/>
+              <a:t> Procedure:</a:t>
+            </a:r>
+          </a:p>
+        </p:txBody>
+      </p:sp>
+      <p:sp>
+        <p:nvSpPr>
           <p:cNvPr id="28" name="TextBox 27">
             <a:extLst>
               <a:ext uri="{FF2B5EF4-FFF2-40B4-BE49-F238E27FC236}">
@@ -12626,7 +12626,7 @@
         </p:nvSpPr>
         <p:spPr>
           <a:xfrm>
-            <a:off x="3717972" y="3671711"/>
+            <a:off x="4998426" y="3556474"/>
             <a:ext cx="4668140" cy="1169551"/>
           </a:xfrm>
           <a:prstGeom prst="rect">
@@ -12724,7 +12724,7 @@
         </p:nvSpPr>
         <p:spPr>
           <a:xfrm>
-            <a:off x="4879046" y="4619018"/>
+            <a:off x="4998426" y="4650213"/>
             <a:ext cx="4828372" cy="1600438"/>
           </a:xfrm>
           <a:prstGeom prst="rect">
@@ -12839,7 +12839,7 @@
         </p:nvSpPr>
         <p:spPr>
           <a:xfrm>
-            <a:off x="3413466" y="5976795"/>
+            <a:off x="4998426" y="6147441"/>
             <a:ext cx="3677566" cy="738664"/>
           </a:xfrm>
           <a:prstGeom prst="rect">
@@ -12906,8 +12906,8 @@
         </p:nvSpPr>
         <p:spPr>
           <a:xfrm>
-            <a:off x="8805672" y="4517136"/>
-            <a:ext cx="2971326" cy="369332"/>
+            <a:off x="10196034" y="4327047"/>
+            <a:ext cx="1813086" cy="646331"/>
           </a:xfrm>
           <a:prstGeom prst="rect">
             <a:avLst/>
@@ -12920,7 +12920,7 @@
           </a:ln>
         </p:spPr>
         <p:txBody>
-          <a:bodyPr wrap="none" rtlCol="0">
+          <a:bodyPr wrap="square" rtlCol="0">
             <a:spAutoFit/>
           </a:bodyPr>
           <a:lstStyle/>
@@ -13080,91 +13080,6 @@
           </a:p>
         </p:txBody>
       </p:sp>
-      <p:sp>
-        <p:nvSpPr>
-          <p:cNvPr id="3" name="Content Placeholder 2">
-            <a:extLst>
-              <a:ext uri="{FF2B5EF4-FFF2-40B4-BE49-F238E27FC236}">
-                <a16:creationId xmlns:a16="http://schemas.microsoft.com/office/drawing/2014/main" id="{1376FFCF-F09D-CE03-F022-D39AD4A97E9E}"/>
-              </a:ext>
-            </a:extLst>
-          </p:cNvPr>
-          <p:cNvSpPr>
-            <a:spLocks noGrp="1"/>
-          </p:cNvSpPr>
-          <p:nvPr>
-            <p:ph idx="1"/>
-          </p:nvPr>
-        </p:nvSpPr>
-        <p:spPr>
-          <a:xfrm>
-            <a:off x="268946" y="2505200"/>
-            <a:ext cx="10515600" cy="4351338"/>
-          </a:xfrm>
-        </p:spPr>
-        <p:txBody>
-          <a:bodyPr/>
-          <a:lstStyle/>
-          <a:p>
-            <a:r>
-              <a:rPr lang="en-US" dirty="0"/>
-              <a:t>Queue represented as an array of items</a:t>
-            </a:r>
-          </a:p>
-          <a:p>
-            <a:pPr lvl="1"/>
-            <a:r>
-              <a:rPr lang="en-US" dirty="0">
-                <a:solidFill>
-                  <a:srgbClr val="0070C0"/>
-                </a:solidFill>
-              </a:rPr>
-              <a:t>A “front” index to indicate the oldest item in the queue</a:t>
-            </a:r>
-          </a:p>
-          <a:p>
-            <a:pPr lvl="1"/>
-            <a:r>
-              <a:rPr lang="en-US" dirty="0">
-                <a:solidFill>
-                  <a:schemeClr val="accent2">
-                    <a:lumMod val="75000"/>
-                  </a:schemeClr>
-                </a:solidFill>
-              </a:rPr>
-              <a:t>A “back” index to indicate the most recent item in the queue</a:t>
-            </a:r>
-          </a:p>
-          <a:p>
-            <a:r>
-              <a:rPr lang="en-US" dirty="0"/>
-              <a:t>enqueue Procedure:</a:t>
-            </a:r>
-          </a:p>
-          <a:p>
-            <a:endParaRPr lang="en-US" dirty="0"/>
-          </a:p>
-          <a:p>
-            <a:r>
-              <a:rPr lang="en-US" dirty="0"/>
-              <a:t>dequeue Procedure:</a:t>
-            </a:r>
-          </a:p>
-          <a:p>
-            <a:endParaRPr lang="en-US" dirty="0"/>
-          </a:p>
-          <a:p>
-            <a:r>
-              <a:rPr lang="en-US" dirty="0" err="1"/>
-              <a:t>isEmpty</a:t>
-            </a:r>
-            <a:r>
-              <a:rPr lang="en-US" dirty="0"/>
-              <a:t> Procedure:</a:t>
-            </a:r>
-          </a:p>
-        </p:txBody>
-      </p:sp>
       <p:grpSp>
         <p:nvGrpSpPr>
           <p:cNvPr id="29" name="Group 28" descr="An illustration of a circular array queue data structure. The elements of the queue are contained in an array. Because the array will not necessarily be occupied starting from index 0, we additionally have a field called &quot;front&quot; that indicates which index of the array contains the first item in the queue, and a field called &quot;back&quot; that indicates which index in teh array contains the last item in the queue.">
@@ -13179,7 +13094,7 @@
         </p:nvGrpSpPr>
         <p:grpSpPr>
           <a:xfrm>
-            <a:off x="1300186" y="1403212"/>
+            <a:off x="1300186" y="1266578"/>
             <a:ext cx="6519765" cy="1221610"/>
             <a:chOff x="1300186" y="1403212"/>
             <a:chExt cx="6519765" cy="1221610"/>
@@ -14493,6 +14408,91 @@
       </p:grpSp>
       <p:sp>
         <p:nvSpPr>
+          <p:cNvPr id="3" name="Content Placeholder 2">
+            <a:extLst>
+              <a:ext uri="{FF2B5EF4-FFF2-40B4-BE49-F238E27FC236}">
+                <a16:creationId xmlns:a16="http://schemas.microsoft.com/office/drawing/2014/main" id="{1376FFCF-F09D-CE03-F022-D39AD4A97E9E}"/>
+              </a:ext>
+            </a:extLst>
+          </p:cNvPr>
+          <p:cNvSpPr>
+            <a:spLocks noGrp="1"/>
+          </p:cNvSpPr>
+          <p:nvPr>
+            <p:ph idx="1"/>
+          </p:nvPr>
+        </p:nvSpPr>
+        <p:spPr>
+          <a:xfrm>
+            <a:off x="268946" y="2316011"/>
+            <a:ext cx="10515600" cy="4351338"/>
+          </a:xfrm>
+        </p:spPr>
+        <p:txBody>
+          <a:bodyPr/>
+          <a:lstStyle/>
+          <a:p>
+            <a:r>
+              <a:rPr lang="en-US" dirty="0"/>
+              <a:t>Queue represented as an array of items</a:t>
+            </a:r>
+          </a:p>
+          <a:p>
+            <a:pPr lvl="1"/>
+            <a:r>
+              <a:rPr lang="en-US" dirty="0">
+                <a:solidFill>
+                  <a:srgbClr val="0070C0"/>
+                </a:solidFill>
+              </a:rPr>
+              <a:t>A “front” index to indicate the oldest item in the queue</a:t>
+            </a:r>
+          </a:p>
+          <a:p>
+            <a:pPr lvl="1"/>
+            <a:r>
+              <a:rPr lang="en-US" dirty="0">
+                <a:solidFill>
+                  <a:schemeClr val="accent2">
+                    <a:lumMod val="75000"/>
+                  </a:schemeClr>
+                </a:solidFill>
+              </a:rPr>
+              <a:t>A “back” index to indicate the most recent item in the queue</a:t>
+            </a:r>
+          </a:p>
+          <a:p>
+            <a:r>
+              <a:rPr lang="en-US" dirty="0"/>
+              <a:t>enqueue Procedure:</a:t>
+            </a:r>
+          </a:p>
+          <a:p>
+            <a:endParaRPr lang="en-US" dirty="0"/>
+          </a:p>
+          <a:p>
+            <a:r>
+              <a:rPr lang="en-US" dirty="0"/>
+              <a:t>dequeue Procedure:</a:t>
+            </a:r>
+          </a:p>
+          <a:p>
+            <a:endParaRPr lang="en-US" dirty="0"/>
+          </a:p>
+          <a:p>
+            <a:r>
+              <a:rPr lang="en-US" dirty="0" err="1"/>
+              <a:t>isEmpty</a:t>
+            </a:r>
+            <a:r>
+              <a:rPr lang="en-US" dirty="0"/>
+              <a:t> Procedure:</a:t>
+            </a:r>
+          </a:p>
+        </p:txBody>
+      </p:sp>
+      <p:sp>
+        <p:nvSpPr>
           <p:cNvPr id="32" name="TextBox 31">
             <a:extLst>
               <a:ext uri="{FF2B5EF4-FFF2-40B4-BE49-F238E27FC236}">
@@ -14505,7 +14505,7 @@
         </p:nvSpPr>
         <p:spPr>
           <a:xfrm>
-            <a:off x="3717972" y="3671711"/>
+            <a:off x="5725443" y="3440486"/>
             <a:ext cx="5150352" cy="1384995"/>
           </a:xfrm>
           <a:prstGeom prst="rect">
@@ -14621,7 +14621,7 @@
         </p:nvSpPr>
         <p:spPr>
           <a:xfrm>
-            <a:off x="5790906" y="4772906"/>
+            <a:off x="5725443" y="4661212"/>
             <a:ext cx="5327136" cy="1600438"/>
           </a:xfrm>
           <a:prstGeom prst="rect">
@@ -14736,7 +14736,7 @@
         </p:nvSpPr>
         <p:spPr>
           <a:xfrm>
-            <a:off x="3413466" y="5976795"/>
+            <a:off x="5790906" y="6182846"/>
             <a:ext cx="4057454" cy="738664"/>
           </a:xfrm>
           <a:prstGeom prst="rect">
@@ -14803,7 +14803,7 @@
         </p:nvSpPr>
         <p:spPr>
           <a:xfrm>
-            <a:off x="9082568" y="2182501"/>
+            <a:off x="9868969" y="2262995"/>
             <a:ext cx="2117759" cy="923330"/>
           </a:xfrm>
           <a:prstGeom prst="rect">
@@ -14990,7 +14990,12 @@
             <p:ph type="title"/>
           </p:nvPr>
         </p:nvSpPr>
-        <p:spPr/>
+        <p:spPr>
+          <a:xfrm>
+            <a:off x="838200" y="365125"/>
+            <a:ext cx="5471160" cy="1325563"/>
+          </a:xfrm>
+        </p:spPr>
         <p:txBody>
           <a:bodyPr/>
           <a:lstStyle/>
@@ -15002,6 +15007,41 @@
           </a:p>
         </p:txBody>
       </p:sp>
+      <p:pic>
+        <p:nvPicPr>
+          <p:cNvPr id="11" name="Picture 10" descr="A roll of cookie dough with a green heart">
+            <a:extLst>
+              <a:ext uri="{FF2B5EF4-FFF2-40B4-BE49-F238E27FC236}">
+                <a16:creationId xmlns:a16="http://schemas.microsoft.com/office/drawing/2014/main" id="{484E48A8-C976-1543-2D65-88912CA42409}"/>
+              </a:ext>
+            </a:extLst>
+          </p:cNvPr>
+          <p:cNvPicPr>
+            <a:picLocks noChangeAspect="1"/>
+          </p:cNvPicPr>
+          <p:nvPr/>
+        </p:nvPicPr>
+        <p:blipFill rotWithShape="1">
+          <a:blip r:embed="rId2">
+            <a:extLst>
+              <a:ext uri="{28A0092B-C50C-407E-A947-70E740481C1C}">
+                <a14:useLocalDpi xmlns:a14="http://schemas.microsoft.com/office/drawing/2010/main" val="0"/>
+              </a:ext>
+            </a:extLst>
+          </a:blip>
+          <a:srcRect l="11008" t="9884" r="16628" b="26667"/>
+          <a:stretch/>
+        </p:blipFill>
+        <p:spPr>
+          <a:xfrm>
+            <a:off x="8324430" y="170661"/>
+            <a:ext cx="2210356" cy="1453531"/>
+          </a:xfrm>
+          <a:prstGeom prst="rect">
+            <a:avLst/>
+          </a:prstGeom>
+        </p:spPr>
+      </p:pic>
       <p:sp>
         <p:nvSpPr>
           <p:cNvPr id="3" name="Content Placeholder 2">
@@ -15024,7 +15064,7 @@
         <p:spPr>
           <a:xfrm>
             <a:off x="136451" y="1793727"/>
-            <a:ext cx="10515600" cy="4699148"/>
+            <a:ext cx="6894269" cy="4699148"/>
           </a:xfrm>
         </p:spPr>
         <p:txBody>
@@ -15153,7 +15193,7 @@
           <p:nvPr/>
         </p:nvPicPr>
         <p:blipFill>
-          <a:blip r:embed="rId2">
+          <a:blip r:embed="rId3">
             <a:extLst>
               <a:ext uri="{28A0092B-C50C-407E-A947-70E740481C1C}">
                 <a14:useLocalDpi xmlns:a14="http://schemas.microsoft.com/office/drawing/2010/main" val="0"/>
@@ -15167,8 +15207,8 @@
         </p:blipFill>
         <p:spPr bwMode="auto">
           <a:xfrm>
-            <a:off x="8426317" y="95693"/>
-            <a:ext cx="3531765" cy="2361868"/>
+            <a:off x="8207168" y="1906260"/>
+            <a:ext cx="2444883" cy="1635016"/>
           </a:xfrm>
           <a:prstGeom prst="rect">
             <a:avLst/>
@@ -15187,45 +15227,13 @@
       </p:pic>
       <p:pic>
         <p:nvPicPr>
-          <p:cNvPr id="11" name="Picture 10" descr="A roll of cookie dough with a green heart">
-            <a:extLst>
-              <a:ext uri="{FF2B5EF4-FFF2-40B4-BE49-F238E27FC236}">
-                <a16:creationId xmlns:a16="http://schemas.microsoft.com/office/drawing/2014/main" id="{484E48A8-C976-1543-2D65-88912CA42409}"/>
-              </a:ext>
-            </a:extLst>
-          </p:cNvPr>
-          <p:cNvPicPr>
-            <a:picLocks noChangeAspect="1"/>
-          </p:cNvPicPr>
-          <p:nvPr/>
-        </p:nvPicPr>
-        <p:blipFill rotWithShape="1">
-          <a:blip r:embed="rId3">
-            <a:extLst>
-              <a:ext uri="{28A0092B-C50C-407E-A947-70E740481C1C}">
-                <a14:useLocalDpi xmlns:a14="http://schemas.microsoft.com/office/drawing/2010/main" val="0"/>
-              </a:ext>
-            </a:extLst>
-          </a:blip>
-          <a:srcRect l="11008" t="9884" r="16628" b="26667"/>
-          <a:stretch/>
-        </p:blipFill>
-        <p:spPr>
-          <a:xfrm>
-            <a:off x="4973432" y="95693"/>
-            <a:ext cx="3121489" cy="2052692"/>
-          </a:xfrm>
-          <a:prstGeom prst="rect">
-            <a:avLst/>
-          </a:prstGeom>
-        </p:spPr>
-      </p:pic>
-      <p:pic>
-        <p:nvPicPr>
-          <p:cNvPr id="8" name="Picture 7">
+          <p:cNvPr id="8" name="Picture 7" descr="Nathan's son, Robin, and his dog, Bucky.">
             <a:extLst>
               <a:ext uri="{FF2B5EF4-FFF2-40B4-BE49-F238E27FC236}">
                 <a16:creationId xmlns:a16="http://schemas.microsoft.com/office/drawing/2014/main" id="{65A92173-4B00-F11C-CF7C-FA7D7A9E99A9}"/>
+              </a:ext>
+              <a:ext uri="{C183D7F6-B498-43B3-948B-1728B52AA6E4}">
+                <adec:decorative xmlns:adec="http://schemas.microsoft.com/office/drawing/2017/decorative" val="0"/>
               </a:ext>
             </a:extLst>
           </p:cNvPr>
@@ -15248,8 +15256,8 @@
         </p:blipFill>
         <p:spPr>
           <a:xfrm>
-            <a:off x="5734919" y="2718520"/>
-            <a:ext cx="4917131" cy="3693431"/>
+            <a:off x="7779817" y="3853321"/>
+            <a:ext cx="3299583" cy="2478433"/>
           </a:xfrm>
           <a:prstGeom prst="rect">
             <a:avLst/>
